--- a/DBTUNING/ch11_UNION_UNIONALL_DISTINCT/ch11_교안.pptx
+++ b/DBTUNING/ch11_UNION_UNIONALL_DISTINCT/ch11_교안.pptx
@@ -545,7 +545,7 @@
           <a:lstStyle/>
           <a:p>
             <a:r>
-              <a:t>9장은 집합 연산자를 다루지만 문법 수업이 아니다. 핵심 질문은 하나다 — 중복을 제거하는 데 드는 비용은 실행계획의 어느 지표에 나타나는가. 이번 장에서 학습자는 Buffers가 완전히 같은데도 실제 소요 시간은 두 배 이상 차이 나는 사례를 직접 보게 된다. 여기서 앞 장까지 익힌 Buffers 중심의 판단 습관에 처음으로 한계가 생긴다는 점을 미리 예고해 두면 수업 몰입도가 올라간다. DDL 변경은 없고 기존 PK만 사용한다는 점도 안내한다.</a:t>
+              <a:t>ch11은 집합 연산자를 다루지만 문법 수업이 아니다. 핵심 질문은 하나다 — 중복을 제거하는 데 드는 비용은 실행계획의 어느 지표에 나타나는가. 이번 장에서 학습자는 Buffers가 완전히 같은데도 실제 소요 시간은 두 배 이상 차이 나는 사례를 직접 보게 된다. 여기서 앞 장까지 익힌 Buffers 중심의 판단 습관에 처음으로 한계가 생긴다는 점을 미리 예고해 두면 수업 몰입도가 올라간다. DDL 변경은 없고 기존 PK만 사용한다는 점도 안내한다.</a:t>
             </a:r>
           </a:p>
         </p:txBody>
@@ -685,7 +685,7 @@
           <a:lstStyle/>
           <a:p>
             <a:r>
-              <a:t>이 절이 9장의 이론적 중심이다. 여기서 세운 원리를 다음 절의 실측이 그대로 확인해 준다. 순서를 뒤집지 말고 원리를 먼저 세우는 편이 좋다 — 실측을 먼저 보여주면 학습자는 숫자를 외우려 들고, 원리를 먼저 세우면 숫자를 근거로 쓰게 된다. 특히 Buffers의 정의를 다시 정확히 확인하는 것이 이 절의 실질적 목표다. 지표의 정의로 돌아가는 훈련은 이번 장뿐 아니라 이후 모든 장에서 반복되므로, 여기서 한 번 확실히 몸에 붙여두면 나중에 같은 설명을 반복할 필요가 크게 줄어든다.</a:t>
+              <a:t>이 절이 ch11의 이론적 중심이다. 여기서 세운 원리를 다음 절의 실측이 그대로 확인해 준다. 순서를 뒤집지 말고 원리를 먼저 세우는 편이 좋다 — 실측을 먼저 보여주면 학습자는 숫자를 외우려 들고, 원리를 먼저 세우면 숫자를 근거로 쓰게 된다. 특히 Buffers의 정의를 다시 정확히 확인하는 것이 이 절의 실질적 목표다. 지표의 정의로 돌아가는 훈련은 이번 장뿐 아니라 이후 모든 장에서 반복되므로, 여기서 한 번 확실히 몸에 붙여두면 나중에 같은 설명을 반복할 필요가 크게 줄어든다.</a:t>
             </a:r>
           </a:p>
         </p:txBody>
@@ -1385,7 +1385,7 @@
           <a:lstStyle/>
           <a:p>
             <a:r>
-              <a:t>이 절이 9장의 하이라이트다. 슬라이드를 넘기기 전에 앞서 적어 둔 학습자들의 예측을 다시 꺼내 놓고 시작하면 효과가 크다. 대부분 "UNION 쪽 Buffers가 더 클 것"이라고 예측했을 텐데 실측은 완전히 같다. 예측이 빗나간 순간이 가장 잘 기억되므로, 놀란 상태에서 곧바로 원인 해석으로 넘어가지 말고 잠시 관측 사실만 확인하는 시간을 두는 편이 좋다. 관측과 해석을 분리하는 습관을 여기서 훈련시킨다. 무엇이 보이는가를 먼저 다 말하게 한 뒤에야 왜 그런가로 넘어가는 순서가 이 절 전체의 진행 방식이다.</a:t>
+              <a:t>이 절이 ch11의 하이라이트다. 슬라이드를 넘기기 전에 앞서 적어 둔 학습자들의 예측을 다시 꺼내 놓고 시작하면 효과가 크다. 대부분 "UNION 쪽 Buffers가 더 클 것"이라고 예측했을 텐데 실측은 완전히 같다. 예측이 빗나간 순간이 가장 잘 기억되므로, 놀란 상태에서 곧바로 원인 해석으로 넘어가지 말고 잠시 관측 사실만 확인하는 시간을 두는 편이 좋다. 관측과 해석을 분리하는 습관을 여기서 훈련시킨다. 무엇이 보이는가를 먼저 다 말하게 한 뒤에야 왜 그런가로 넘어가는 순서가 이 절 전체의 진행 방식이다.</a:t>
             </a:r>
           </a:p>
         </p:txBody>
@@ -2015,7 +2015,7 @@
           <a:lstStyle/>
           <a:p>
             <a:r>
-              <a:t>9장에서 가장 실무적인 슬라이드다. 성능 개선안을 검토할 때 첫 번째 질문은 언제나 "결과가 같은가"여야 한다. 특히 집계 쿼리에서 UNION을 UNION ALL로 바꾸는 변경은 리뷰에서 통과되기 쉽다 — 문법이 단순해지고 빨라지기 때문이다. 그러나 겹칠 수 있는 집합이라면 그 순간부터 리포트의 숫자가 틀린다. 실습 5번 문항이 이 판단을 직접 묻는다. 또한 이런 변경은 테스트에서도 잘 걸리지 않는다. 개발 데이터가 작아 겹침이 없으면 두 결과가 같게 나오기 때문이다. 검증 데이터의 성질까지 함께 봐야 한다.</a:t>
+              <a:t>ch11에서 가장 실무적인 슬라이드다. 성능 개선안을 검토할 때 첫 번째 질문은 언제나 "결과가 같은가"여야 한다. 특히 집계 쿼리에서 UNION을 UNION ALL로 바꾸는 변경은 리뷰에서 통과되기 쉽다 — 문법이 단순해지고 빨라지기 때문이다. 그러나 겹칠 수 있는 집합이라면 그 순간부터 리포트의 숫자가 틀린다. 실습 5번 문항이 이 판단을 직접 묻는다. 또한 이런 변경은 테스트에서도 잘 걸리지 않는다. 개발 데이터가 작아 겹침이 없으면 두 결과가 같게 나오기 때문이다. 검증 데이터의 성질까지 함께 봐야 한다.</a:t>
             </a:r>
           </a:p>
         </p:txBody>
@@ -6642,7 +6642,7 @@
                 </a:solidFill>
                 <a:latin typeface="Malgun Gothic"/>
               </a:rPr>
-              <a:t>Oracle SQL 튜닝 과정  ·  제9장</a:t>
+              <a:t>Oracle SQL 튜닝 과정  ·  제ch11</a:t>
             </a:r>
           </a:p>
         </p:txBody>
@@ -15599,7 +15599,7 @@
                 </a:solidFill>
                 <a:latin typeface="Malgun Gothic"/>
               </a:rPr>
-              <a:t>•  실습문제 10문항 — SQL튜닝_Ch09_문제.md</a:t>
+              <a:t>•  실습문제 10문항 — ch11_문제.md</a:t>
             </a:r>
           </a:p>
           <a:p>
@@ -15698,7 +15698,7 @@
                 </a:solidFill>
                 <a:latin typeface="Malgun Gothic"/>
               </a:rPr>
-              <a:t>    –  해설은 SQL튜닝_Ch09_해설.md에서 문항 번호와 1:1로 대응한다</a:t>
+              <a:t>    –  해설은 ch11_해설.md에서 문항 번호와 1:1로 대응한다</a:t>
             </a:r>
           </a:p>
         </p:txBody>

--- a/DBTUNING/ch11_UNION_UNIONALL_DISTINCT/ch11_교안.pptx
+++ b/DBTUNING/ch11_UNION_UNIONALL_DISTINCT/ch11_교안.pptx
@@ -6642,7 +6642,7 @@
                 </a:solidFill>
                 <a:latin typeface="Malgun Gothic"/>
               </a:rPr>
-              <a:t>Oracle SQL 튜닝 과정  ·  제ch11</a:t>
+              <a:t>Oracle SQL 튜닝 과정  ·  ch11</a:t>
             </a:r>
           </a:p>
         </p:txBody>
